--- a/slides/05.pptx
+++ b/slides/05.pptx
@@ -2336,7 +2336,7 @@
           </a:ln>
           <a:extLst>
             <a:ext uri="{C572A759-6A51-4108-AA02-DFA0A04FC94B}">
-              <ma14:wrappingTextBoxFlag xmlns:ma14="http://schemas.microsoft.com/office/mac/drawingml/2011/main" xmlns:a14="http://schemas.microsoft.com/office/drawing/2010/main" xmlns:m="http://schemas.openxmlformats.org/officeDocument/2006/math" xmlns="" val="1"/>
+              <ma14:wrappingTextBoxFlag xmlns="" xmlns:m="http://schemas.openxmlformats.org/officeDocument/2006/math" xmlns:a14="http://schemas.microsoft.com/office/drawing/2010/main" xmlns:ma14="http://schemas.microsoft.com/office/mac/drawingml/2011/main" val="1"/>
             </a:ext>
           </a:extLst>
         </p:spPr>
@@ -2420,7 +2420,7 @@
           </a:ln>
           <a:extLst>
             <a:ext uri="{C572A759-6A51-4108-AA02-DFA0A04FC94B}">
-              <ma14:wrappingTextBoxFlag xmlns:ma14="http://schemas.microsoft.com/office/mac/drawingml/2011/main" xmlns:a14="http://schemas.microsoft.com/office/drawing/2010/main" xmlns:m="http://schemas.openxmlformats.org/officeDocument/2006/math" xmlns="" val="1"/>
+              <ma14:wrappingTextBoxFlag xmlns="" xmlns:m="http://schemas.openxmlformats.org/officeDocument/2006/math" xmlns:a14="http://schemas.microsoft.com/office/drawing/2010/main" xmlns:ma14="http://schemas.microsoft.com/office/mac/drawingml/2011/main" val="1"/>
             </a:ext>
           </a:extLst>
         </p:spPr>
@@ -3374,7 +3374,7 @@
           </a:prstGeom>
           <a:extLst>
             <a:ext uri="{C572A759-6A51-4108-AA02-DFA0A04FC94B}">
-              <ma14:wrappingTextBoxFlag xmlns:ma14="http://schemas.microsoft.com/office/mac/drawingml/2011/main" xmlns:a14="http://schemas.microsoft.com/office/drawing/2010/main" xmlns:m="http://schemas.openxmlformats.org/officeDocument/2006/math" xmlns="" val="1"/>
+              <ma14:wrappingTextBoxFlag xmlns="" xmlns:m="http://schemas.openxmlformats.org/officeDocument/2006/math" xmlns:a14="http://schemas.microsoft.com/office/drawing/2010/main" xmlns:ma14="http://schemas.microsoft.com/office/mac/drawingml/2011/main" val="1"/>
             </a:ext>
           </a:extLst>
         </p:spPr>
@@ -7859,7 +7859,7 @@
         </p:nvCxnSpPr>
         <p:spPr>
           <a:xfrm>
-            <a:off x="9453093" y="7481140"/>
+            <a:off x="9810787" y="5288072"/>
             <a:ext cx="1302816" cy="962682"/>
           </a:xfrm>
           <a:prstGeom prst="straightConnector1">
@@ -7904,7 +7904,7 @@
         </p:nvSpPr>
         <p:spPr>
           <a:xfrm>
-            <a:off x="10431404" y="8253518"/>
+            <a:off x="11300084" y="5769413"/>
             <a:ext cx="2564805" cy="841256"/>
           </a:xfrm>
           <a:prstGeom prst="rect">
@@ -8275,8 +8275,8 @@
           </p:pic>
         </mc:Fallback>
       </mc:AlternateContent>
-      <mc:AlternateContent xmlns:mc="http://schemas.openxmlformats.org/markup-compatibility/2006">
-        <mc:Choice xmlns:p14="http://schemas.microsoft.com/office/powerpoint/2010/main" Requires="p14">
+      <mc:AlternateContent xmlns:mc="http://schemas.openxmlformats.org/markup-compatibility/2006" xmlns:p14="http://schemas.microsoft.com/office/powerpoint/2010/main">
+        <mc:Choice Requires="p14">
           <p:contentPart p14:bwMode="auto" r:id="rId11">
             <p14:nvContentPartPr>
               <p14:cNvPr id="8" name="Ink 7">
@@ -8295,7 +8295,7 @@
             </p14:xfrm>
           </p:contentPart>
         </mc:Choice>
-        <mc:Fallback>
+        <mc:Fallback xmlns="">
           <p:pic>
             <p:nvPicPr>
               <p:cNvPr id="8" name="Ink 7">
@@ -8326,8 +8326,8 @@
           </p:pic>
         </mc:Fallback>
       </mc:AlternateContent>
-      <mc:AlternateContent xmlns:mc="http://schemas.openxmlformats.org/markup-compatibility/2006">
-        <mc:Choice xmlns:p14="http://schemas.microsoft.com/office/powerpoint/2010/main" Requires="p14">
+      <mc:AlternateContent xmlns:mc="http://schemas.openxmlformats.org/markup-compatibility/2006" xmlns:p14="http://schemas.microsoft.com/office/powerpoint/2010/main">
+        <mc:Choice Requires="p14">
           <p:contentPart p14:bwMode="auto" r:id="rId13">
             <p14:nvContentPartPr>
               <p14:cNvPr id="10" name="Ink 9">
@@ -8346,7 +8346,7 @@
             </p14:xfrm>
           </p:contentPart>
         </mc:Choice>
-        <mc:Fallback>
+        <mc:Fallback xmlns="">
           <p:pic>
             <p:nvPicPr>
               <p:cNvPr id="10" name="Ink 9">
@@ -9357,8 +9357,8 @@
           </a:prstGeom>
         </p:spPr>
       </p:pic>
-      <mc:AlternateContent xmlns:mc="http://schemas.openxmlformats.org/markup-compatibility/2006">
-        <mc:Choice xmlns:p14="http://schemas.microsoft.com/office/powerpoint/2010/main" Requires="p14">
+      <mc:AlternateContent xmlns:mc="http://schemas.openxmlformats.org/markup-compatibility/2006" xmlns:p14="http://schemas.microsoft.com/office/powerpoint/2010/main">
+        <mc:Choice Requires="p14">
           <p:contentPart p14:bwMode="auto" r:id="rId3">
             <p14:nvContentPartPr>
               <p14:cNvPr id="5" name="インク 4">
@@ -9377,7 +9377,7 @@
             </p14:xfrm>
           </p:contentPart>
         </mc:Choice>
-        <mc:Fallback>
+        <mc:Fallback xmlns="">
           <p:pic>
             <p:nvPicPr>
               <p:cNvPr id="5" name="インク 4">
@@ -12978,7 +12978,7 @@
           </a:prstGeom>
           <a:extLst>
             <a:ext uri="{C572A759-6A51-4108-AA02-DFA0A04FC94B}">
-              <ma14:wrappingTextBoxFlag xmlns:ma14="http://schemas.microsoft.com/office/mac/drawingml/2011/main" xmlns:a14="http://schemas.microsoft.com/office/drawing/2010/main" xmlns:m="http://schemas.openxmlformats.org/officeDocument/2006/math" xmlns="" val="1"/>
+              <ma14:wrappingTextBoxFlag xmlns="" xmlns:m="http://schemas.openxmlformats.org/officeDocument/2006/math" xmlns:a14="http://schemas.microsoft.com/office/drawing/2010/main" xmlns:ma14="http://schemas.microsoft.com/office/mac/drawingml/2011/main" val="1"/>
             </a:ext>
           </a:extLst>
         </p:spPr>
@@ -13262,7 +13262,7 @@
           </a:prstGeom>
           <a:extLst>
             <a:ext uri="{C572A759-6A51-4108-AA02-DFA0A04FC94B}">
-              <ma14:wrappingTextBoxFlag xmlns:ma14="http://schemas.microsoft.com/office/mac/drawingml/2011/main" xmlns:a14="http://schemas.microsoft.com/office/drawing/2010/main" xmlns:m="http://schemas.openxmlformats.org/officeDocument/2006/math" xmlns="" val="1"/>
+              <ma14:wrappingTextBoxFlag xmlns="" xmlns:m="http://schemas.openxmlformats.org/officeDocument/2006/math" xmlns:a14="http://schemas.microsoft.com/office/drawing/2010/main" xmlns:ma14="http://schemas.microsoft.com/office/mac/drawingml/2011/main" val="1"/>
             </a:ext>
           </a:extLst>
         </p:spPr>
@@ -15625,7 +15625,7 @@
           </a:ln>
           <a:extLst>
             <a:ext uri="{C572A759-6A51-4108-AA02-DFA0A04FC94B}">
-              <ma14:wrappingTextBoxFlag xmlns:ma14="http://schemas.microsoft.com/office/mac/drawingml/2011/main" xmlns:a14="http://schemas.microsoft.com/office/drawing/2010/main" xmlns:m="http://schemas.openxmlformats.org/officeDocument/2006/math" xmlns="" val="1"/>
+              <ma14:wrappingTextBoxFlag xmlns="" xmlns:m="http://schemas.openxmlformats.org/officeDocument/2006/math" xmlns:a14="http://schemas.microsoft.com/office/drawing/2010/main" xmlns:ma14="http://schemas.microsoft.com/office/mac/drawingml/2011/main" val="1"/>
             </a:ext>
           </a:extLst>
         </p:spPr>
@@ -15718,7 +15718,7 @@
           </a:ln>
           <a:extLst>
             <a:ext uri="{C572A759-6A51-4108-AA02-DFA0A04FC94B}">
-              <ma14:wrappingTextBoxFlag xmlns:ma14="http://schemas.microsoft.com/office/mac/drawingml/2011/main" xmlns:a14="http://schemas.microsoft.com/office/drawing/2010/main" xmlns:m="http://schemas.openxmlformats.org/officeDocument/2006/math" xmlns="" val="1"/>
+              <ma14:wrappingTextBoxFlag xmlns="" xmlns:m="http://schemas.openxmlformats.org/officeDocument/2006/math" xmlns:a14="http://schemas.microsoft.com/office/drawing/2010/main" xmlns:ma14="http://schemas.microsoft.com/office/mac/drawingml/2011/main" val="1"/>
             </a:ext>
           </a:extLst>
         </p:spPr>
@@ -15812,7 +15812,7 @@
           </a:ln>
           <a:extLst>
             <a:ext uri="{C572A759-6A51-4108-AA02-DFA0A04FC94B}">
-              <ma14:wrappingTextBoxFlag xmlns:ma14="http://schemas.microsoft.com/office/mac/drawingml/2011/main" xmlns:a14="http://schemas.microsoft.com/office/drawing/2010/main" xmlns:m="http://schemas.openxmlformats.org/officeDocument/2006/math" xmlns="" val="1"/>
+              <ma14:wrappingTextBoxFlag xmlns="" xmlns:m="http://schemas.openxmlformats.org/officeDocument/2006/math" xmlns:a14="http://schemas.microsoft.com/office/drawing/2010/main" xmlns:ma14="http://schemas.microsoft.com/office/mac/drawingml/2011/main" val="1"/>
             </a:ext>
           </a:extLst>
         </p:spPr>
@@ -15895,7 +15895,7 @@
           </a:ln>
           <a:extLst>
             <a:ext uri="{C572A759-6A51-4108-AA02-DFA0A04FC94B}">
-              <ma14:wrappingTextBoxFlag xmlns:ma14="http://schemas.microsoft.com/office/mac/drawingml/2011/main" xmlns:a14="http://schemas.microsoft.com/office/drawing/2010/main" xmlns:m="http://schemas.openxmlformats.org/officeDocument/2006/math" xmlns="" val="1"/>
+              <ma14:wrappingTextBoxFlag xmlns="" xmlns:m="http://schemas.openxmlformats.org/officeDocument/2006/math" xmlns:a14="http://schemas.microsoft.com/office/drawing/2010/main" xmlns:ma14="http://schemas.microsoft.com/office/mac/drawingml/2011/main" val="1"/>
             </a:ext>
           </a:extLst>
         </p:spPr>
@@ -15938,7 +15938,7 @@
           </a:ln>
           <a:extLst>
             <a:ext uri="{C572A759-6A51-4108-AA02-DFA0A04FC94B}">
-              <ma14:wrappingTextBoxFlag xmlns:ma14="http://schemas.microsoft.com/office/mac/drawingml/2011/main" xmlns:a14="http://schemas.microsoft.com/office/drawing/2010/main" xmlns:m="http://schemas.openxmlformats.org/officeDocument/2006/math" xmlns="" val="1"/>
+              <ma14:wrappingTextBoxFlag xmlns="" xmlns:m="http://schemas.openxmlformats.org/officeDocument/2006/math" xmlns:a14="http://schemas.microsoft.com/office/drawing/2010/main" xmlns:ma14="http://schemas.microsoft.com/office/mac/drawingml/2011/main" val="1"/>
             </a:ext>
           </a:extLst>
         </p:spPr>
@@ -15977,7 +15977,7 @@
           </a:ln>
           <a:extLst>
             <a:ext uri="{C572A759-6A51-4108-AA02-DFA0A04FC94B}">
-              <ma14:wrappingTextBoxFlag xmlns:ma14="http://schemas.microsoft.com/office/mac/drawingml/2011/main" xmlns:a14="http://schemas.microsoft.com/office/drawing/2010/main" xmlns:m="http://schemas.openxmlformats.org/officeDocument/2006/math" xmlns="" val="1"/>
+              <ma14:wrappingTextBoxFlag xmlns="" xmlns:m="http://schemas.openxmlformats.org/officeDocument/2006/math" xmlns:a14="http://schemas.microsoft.com/office/drawing/2010/main" xmlns:ma14="http://schemas.microsoft.com/office/mac/drawingml/2011/main" val="1"/>
             </a:ext>
           </a:extLst>
         </p:spPr>
@@ -16024,7 +16024,7 @@
           </a:prstGeom>
           <a:extLst>
             <a:ext uri="{C572A759-6A51-4108-AA02-DFA0A04FC94B}">
-              <ma14:wrappingTextBoxFlag xmlns:ma14="http://schemas.microsoft.com/office/mac/drawingml/2011/main" xmlns:a14="http://schemas.microsoft.com/office/drawing/2010/main" xmlns:m="http://schemas.openxmlformats.org/officeDocument/2006/math" xmlns="" val="1"/>
+              <ma14:wrappingTextBoxFlag xmlns="" xmlns:m="http://schemas.openxmlformats.org/officeDocument/2006/math" xmlns:a14="http://schemas.microsoft.com/office/drawing/2010/main" xmlns:ma14="http://schemas.microsoft.com/office/mac/drawingml/2011/main" val="1"/>
             </a:ext>
           </a:extLst>
         </p:spPr>
@@ -18011,7 +18011,7 @@
           </a:ln>
           <a:extLst>
             <a:ext uri="{C572A759-6A51-4108-AA02-DFA0A04FC94B}">
-              <ma14:wrappingTextBoxFlag xmlns:ma14="http://schemas.microsoft.com/office/mac/drawingml/2011/main" xmlns:a14="http://schemas.microsoft.com/office/drawing/2010/main" xmlns:m="http://schemas.openxmlformats.org/officeDocument/2006/math" xmlns="" val="1"/>
+              <ma14:wrappingTextBoxFlag xmlns="" xmlns:m="http://schemas.openxmlformats.org/officeDocument/2006/math" xmlns:a14="http://schemas.microsoft.com/office/drawing/2010/main" xmlns:ma14="http://schemas.microsoft.com/office/mac/drawingml/2011/main" val="1"/>
             </a:ext>
           </a:extLst>
         </p:spPr>
@@ -18100,7 +18100,7 @@
           </a:ln>
           <a:extLst>
             <a:ext uri="{C572A759-6A51-4108-AA02-DFA0A04FC94B}">
-              <ma14:wrappingTextBoxFlag xmlns:ma14="http://schemas.microsoft.com/office/mac/drawingml/2011/main" xmlns:a14="http://schemas.microsoft.com/office/drawing/2010/main" xmlns:m="http://schemas.openxmlformats.org/officeDocument/2006/math" xmlns="" val="1"/>
+              <ma14:wrappingTextBoxFlag xmlns="" xmlns:m="http://schemas.openxmlformats.org/officeDocument/2006/math" xmlns:a14="http://schemas.microsoft.com/office/drawing/2010/main" xmlns:ma14="http://schemas.microsoft.com/office/mac/drawingml/2011/main" val="1"/>
             </a:ext>
           </a:extLst>
         </p:spPr>
@@ -18190,7 +18190,7 @@
           </a:ln>
           <a:extLst>
             <a:ext uri="{C572A759-6A51-4108-AA02-DFA0A04FC94B}">
-              <ma14:wrappingTextBoxFlag xmlns:ma14="http://schemas.microsoft.com/office/mac/drawingml/2011/main" xmlns:a14="http://schemas.microsoft.com/office/drawing/2010/main" xmlns:m="http://schemas.openxmlformats.org/officeDocument/2006/math" xmlns="" val="1"/>
+              <ma14:wrappingTextBoxFlag xmlns="" xmlns:m="http://schemas.openxmlformats.org/officeDocument/2006/math" xmlns:a14="http://schemas.microsoft.com/office/drawing/2010/main" xmlns:ma14="http://schemas.microsoft.com/office/mac/drawingml/2011/main" val="1"/>
             </a:ext>
           </a:extLst>
         </p:spPr>
@@ -18279,7 +18279,7 @@
           </a:ln>
           <a:extLst>
             <a:ext uri="{C572A759-6A51-4108-AA02-DFA0A04FC94B}">
-              <ma14:wrappingTextBoxFlag xmlns:ma14="http://schemas.microsoft.com/office/mac/drawingml/2011/main" xmlns:a14="http://schemas.microsoft.com/office/drawing/2010/main" xmlns:m="http://schemas.openxmlformats.org/officeDocument/2006/math" xmlns="" val="1"/>
+              <ma14:wrappingTextBoxFlag xmlns="" xmlns:m="http://schemas.openxmlformats.org/officeDocument/2006/math" xmlns:a14="http://schemas.microsoft.com/office/drawing/2010/main" xmlns:ma14="http://schemas.microsoft.com/office/mac/drawingml/2011/main" val="1"/>
             </a:ext>
           </a:extLst>
         </p:spPr>
@@ -18318,7 +18318,7 @@
           </a:ln>
           <a:extLst>
             <a:ext uri="{C572A759-6A51-4108-AA02-DFA0A04FC94B}">
-              <ma14:wrappingTextBoxFlag xmlns:ma14="http://schemas.microsoft.com/office/mac/drawingml/2011/main" xmlns:a14="http://schemas.microsoft.com/office/drawing/2010/main" xmlns:m="http://schemas.openxmlformats.org/officeDocument/2006/math" xmlns="" val="1"/>
+              <ma14:wrappingTextBoxFlag xmlns="" xmlns:m="http://schemas.openxmlformats.org/officeDocument/2006/math" xmlns:a14="http://schemas.microsoft.com/office/drawing/2010/main" xmlns:ma14="http://schemas.microsoft.com/office/mac/drawingml/2011/main" val="1"/>
             </a:ext>
           </a:extLst>
         </p:spPr>
@@ -18357,7 +18357,7 @@
           </a:ln>
           <a:extLst>
             <a:ext uri="{C572A759-6A51-4108-AA02-DFA0A04FC94B}">
-              <ma14:wrappingTextBoxFlag xmlns:ma14="http://schemas.microsoft.com/office/mac/drawingml/2011/main" xmlns:a14="http://schemas.microsoft.com/office/drawing/2010/main" xmlns:m="http://schemas.openxmlformats.org/officeDocument/2006/math" xmlns="" val="1"/>
+              <ma14:wrappingTextBoxFlag xmlns="" xmlns:m="http://schemas.openxmlformats.org/officeDocument/2006/math" xmlns:a14="http://schemas.microsoft.com/office/drawing/2010/main" xmlns:ma14="http://schemas.microsoft.com/office/mac/drawingml/2011/main" val="1"/>
             </a:ext>
           </a:extLst>
         </p:spPr>
@@ -18404,7 +18404,7 @@
           </a:prstGeom>
           <a:extLst>
             <a:ext uri="{C572A759-6A51-4108-AA02-DFA0A04FC94B}">
-              <ma14:wrappingTextBoxFlag xmlns:ma14="http://schemas.microsoft.com/office/mac/drawingml/2011/main" xmlns:a14="http://schemas.microsoft.com/office/drawing/2010/main" xmlns:m="http://schemas.openxmlformats.org/officeDocument/2006/math" xmlns="" val="1"/>
+              <ma14:wrappingTextBoxFlag xmlns="" xmlns:m="http://schemas.openxmlformats.org/officeDocument/2006/math" xmlns:a14="http://schemas.microsoft.com/office/drawing/2010/main" xmlns:ma14="http://schemas.microsoft.com/office/mac/drawingml/2011/main" val="1"/>
             </a:ext>
           </a:extLst>
         </p:spPr>
@@ -18876,7 +18876,7 @@
           </a:prstGeom>
           <a:extLst>
             <a:ext uri="{C572A759-6A51-4108-AA02-DFA0A04FC94B}">
-              <ma14:wrappingTextBoxFlag xmlns:ma14="http://schemas.microsoft.com/office/mac/drawingml/2011/main" xmlns:a14="http://schemas.microsoft.com/office/drawing/2010/main" xmlns:m="http://schemas.openxmlformats.org/officeDocument/2006/math" xmlns="" val="1"/>
+              <ma14:wrappingTextBoxFlag xmlns="" xmlns:m="http://schemas.openxmlformats.org/officeDocument/2006/math" xmlns:a14="http://schemas.microsoft.com/office/drawing/2010/main" xmlns:ma14="http://schemas.microsoft.com/office/mac/drawingml/2011/main" val="1"/>
             </a:ext>
           </a:extLst>
         </p:spPr>
@@ -18911,7 +18911,7 @@
           </a:ln>
           <a:extLst>
             <a:ext uri="{C572A759-6A51-4108-AA02-DFA0A04FC94B}">
-              <ma14:wrappingTextBoxFlag xmlns:ma14="http://schemas.microsoft.com/office/mac/drawingml/2011/main" xmlns:a14="http://schemas.microsoft.com/office/drawing/2010/main" xmlns:m="http://schemas.openxmlformats.org/officeDocument/2006/math" xmlns="" val="1"/>
+              <ma14:wrappingTextBoxFlag xmlns="" xmlns:m="http://schemas.openxmlformats.org/officeDocument/2006/math" xmlns:a14="http://schemas.microsoft.com/office/drawing/2010/main" xmlns:ma14="http://schemas.microsoft.com/office/mac/drawingml/2011/main" val="1"/>
             </a:ext>
           </a:extLst>
         </p:spPr>
@@ -19129,7 +19129,7 @@
           </a:prstGeom>
           <a:extLst>
             <a:ext uri="{C572A759-6A51-4108-AA02-DFA0A04FC94B}">
-              <ma14:wrappingTextBoxFlag xmlns:ma14="http://schemas.microsoft.com/office/mac/drawingml/2011/main" xmlns:a14="http://schemas.microsoft.com/office/drawing/2010/main" xmlns:m="http://schemas.openxmlformats.org/officeDocument/2006/math" xmlns="" val="1"/>
+              <ma14:wrappingTextBoxFlag xmlns="" xmlns:m="http://schemas.openxmlformats.org/officeDocument/2006/math" xmlns:a14="http://schemas.microsoft.com/office/drawing/2010/main" xmlns:ma14="http://schemas.microsoft.com/office/mac/drawingml/2011/main" val="1"/>
             </a:ext>
           </a:extLst>
         </p:spPr>
@@ -19532,7 +19532,7 @@
           </a:prstGeom>
           <a:extLst>
             <a:ext uri="{C572A759-6A51-4108-AA02-DFA0A04FC94B}">
-              <ma14:wrappingTextBoxFlag xmlns:ma14="http://schemas.microsoft.com/office/mac/drawingml/2011/main" xmlns:a14="http://schemas.microsoft.com/office/drawing/2010/main" xmlns:m="http://schemas.openxmlformats.org/officeDocument/2006/math" xmlns="" val="1"/>
+              <ma14:wrappingTextBoxFlag xmlns="" xmlns:m="http://schemas.openxmlformats.org/officeDocument/2006/math" xmlns:a14="http://schemas.microsoft.com/office/drawing/2010/main" xmlns:ma14="http://schemas.microsoft.com/office/mac/drawingml/2011/main" val="1"/>
             </a:ext>
           </a:extLst>
         </p:spPr>
@@ -19716,7 +19716,7 @@
           </a:prstGeom>
           <a:extLst>
             <a:ext uri="{C572A759-6A51-4108-AA02-DFA0A04FC94B}">
-              <ma14:wrappingTextBoxFlag xmlns:ma14="http://schemas.microsoft.com/office/mac/drawingml/2011/main" xmlns:a14="http://schemas.microsoft.com/office/drawing/2010/main" xmlns:m="http://schemas.openxmlformats.org/officeDocument/2006/math" xmlns="" val="1"/>
+              <ma14:wrappingTextBoxFlag xmlns="" xmlns:m="http://schemas.openxmlformats.org/officeDocument/2006/math" xmlns:a14="http://schemas.microsoft.com/office/drawing/2010/main" xmlns:ma14="http://schemas.microsoft.com/office/mac/drawingml/2011/main" val="1"/>
             </a:ext>
           </a:extLst>
         </p:spPr>
@@ -19919,7 +19919,7 @@
           </a:ln>
           <a:extLst>
             <a:ext uri="{C572A759-6A51-4108-AA02-DFA0A04FC94B}">
-              <ma14:wrappingTextBoxFlag xmlns:ma14="http://schemas.microsoft.com/office/mac/drawingml/2011/main" xmlns:a14="http://schemas.microsoft.com/office/drawing/2010/main" xmlns:m="http://schemas.openxmlformats.org/officeDocument/2006/math" xmlns="" val="1"/>
+              <ma14:wrappingTextBoxFlag xmlns="" xmlns:m="http://schemas.openxmlformats.org/officeDocument/2006/math" xmlns:a14="http://schemas.microsoft.com/office/drawing/2010/main" xmlns:ma14="http://schemas.microsoft.com/office/mac/drawingml/2011/main" val="1"/>
             </a:ext>
           </a:extLst>
         </p:spPr>
@@ -19962,7 +19962,7 @@
           </a:ln>
           <a:extLst>
             <a:ext uri="{C572A759-6A51-4108-AA02-DFA0A04FC94B}">
-              <ma14:wrappingTextBoxFlag xmlns:ma14="http://schemas.microsoft.com/office/mac/drawingml/2011/main" xmlns:a14="http://schemas.microsoft.com/office/drawing/2010/main" xmlns:m="http://schemas.openxmlformats.org/officeDocument/2006/math" xmlns="" val="1"/>
+              <ma14:wrappingTextBoxFlag xmlns="" xmlns:m="http://schemas.openxmlformats.org/officeDocument/2006/math" xmlns:a14="http://schemas.microsoft.com/office/drawing/2010/main" xmlns:ma14="http://schemas.microsoft.com/office/mac/drawingml/2011/main" val="1"/>
             </a:ext>
           </a:extLst>
         </p:spPr>
@@ -20067,7 +20067,7 @@
           </a:ln>
           <a:extLst>
             <a:ext uri="{C572A759-6A51-4108-AA02-DFA0A04FC94B}">
-              <ma14:wrappingTextBoxFlag xmlns:ma14="http://schemas.microsoft.com/office/mac/drawingml/2011/main" xmlns:a14="http://schemas.microsoft.com/office/drawing/2010/main" xmlns:m="http://schemas.openxmlformats.org/officeDocument/2006/math" xmlns="" val="1"/>
+              <ma14:wrappingTextBoxFlag xmlns="" xmlns:m="http://schemas.openxmlformats.org/officeDocument/2006/math" xmlns:a14="http://schemas.microsoft.com/office/drawing/2010/main" xmlns:ma14="http://schemas.microsoft.com/office/mac/drawingml/2011/main" val="1"/>
             </a:ext>
           </a:extLst>
         </p:spPr>
@@ -20170,7 +20170,7 @@
           </a:ln>
           <a:extLst>
             <a:ext uri="{C572A759-6A51-4108-AA02-DFA0A04FC94B}">
-              <ma14:wrappingTextBoxFlag xmlns:ma14="http://schemas.microsoft.com/office/mac/drawingml/2011/main" xmlns:a14="http://schemas.microsoft.com/office/drawing/2010/main" xmlns:m="http://schemas.openxmlformats.org/officeDocument/2006/math" xmlns="" val="1"/>
+              <ma14:wrappingTextBoxFlag xmlns="" xmlns:m="http://schemas.openxmlformats.org/officeDocument/2006/math" xmlns:a14="http://schemas.microsoft.com/office/drawing/2010/main" xmlns:ma14="http://schemas.microsoft.com/office/mac/drawingml/2011/main" val="1"/>
             </a:ext>
           </a:extLst>
         </p:spPr>
@@ -20273,7 +20273,7 @@
           </a:ln>
           <a:extLst>
             <a:ext uri="{C572A759-6A51-4108-AA02-DFA0A04FC94B}">
-              <ma14:wrappingTextBoxFlag xmlns:ma14="http://schemas.microsoft.com/office/mac/drawingml/2011/main" xmlns:a14="http://schemas.microsoft.com/office/drawing/2010/main" xmlns:m="http://schemas.openxmlformats.org/officeDocument/2006/math" xmlns="" val="1"/>
+              <ma14:wrappingTextBoxFlag xmlns="" xmlns:m="http://schemas.openxmlformats.org/officeDocument/2006/math" xmlns:a14="http://schemas.microsoft.com/office/drawing/2010/main" xmlns:ma14="http://schemas.microsoft.com/office/mac/drawingml/2011/main" val="1"/>
             </a:ext>
           </a:extLst>
         </p:spPr>
@@ -20544,7 +20544,7 @@
           </a:ln>
           <a:extLst>
             <a:ext uri="{C572A759-6A51-4108-AA02-DFA0A04FC94B}">
-              <ma14:wrappingTextBoxFlag xmlns:ma14="http://schemas.microsoft.com/office/mac/drawingml/2011/main" xmlns:a14="http://schemas.microsoft.com/office/drawing/2010/main" xmlns:m="http://schemas.openxmlformats.org/officeDocument/2006/math" xmlns="" val="1"/>
+              <ma14:wrappingTextBoxFlag xmlns="" xmlns:m="http://schemas.openxmlformats.org/officeDocument/2006/math" xmlns:a14="http://schemas.microsoft.com/office/drawing/2010/main" xmlns:ma14="http://schemas.microsoft.com/office/mac/drawingml/2011/main" val="1"/>
             </a:ext>
           </a:extLst>
         </p:spPr>
@@ -20647,7 +20647,7 @@
           </a:ln>
           <a:extLst>
             <a:ext uri="{C572A759-6A51-4108-AA02-DFA0A04FC94B}">
-              <ma14:wrappingTextBoxFlag xmlns:ma14="http://schemas.microsoft.com/office/mac/drawingml/2011/main" xmlns:a14="http://schemas.microsoft.com/office/drawing/2010/main" xmlns:m="http://schemas.openxmlformats.org/officeDocument/2006/math" xmlns="" val="1"/>
+              <ma14:wrappingTextBoxFlag xmlns="" xmlns:m="http://schemas.openxmlformats.org/officeDocument/2006/math" xmlns:a14="http://schemas.microsoft.com/office/drawing/2010/main" xmlns:ma14="http://schemas.microsoft.com/office/mac/drawingml/2011/main" val="1"/>
             </a:ext>
           </a:extLst>
         </p:spPr>
@@ -20750,7 +20750,7 @@
           </a:ln>
           <a:extLst>
             <a:ext uri="{C572A759-6A51-4108-AA02-DFA0A04FC94B}">
-              <ma14:wrappingTextBoxFlag xmlns:ma14="http://schemas.microsoft.com/office/mac/drawingml/2011/main" xmlns:a14="http://schemas.microsoft.com/office/drawing/2010/main" xmlns:m="http://schemas.openxmlformats.org/officeDocument/2006/math" xmlns="" val="1"/>
+              <ma14:wrappingTextBoxFlag xmlns="" xmlns:m="http://schemas.openxmlformats.org/officeDocument/2006/math" xmlns:a14="http://schemas.microsoft.com/office/drawing/2010/main" xmlns:ma14="http://schemas.microsoft.com/office/mac/drawingml/2011/main" val="1"/>
             </a:ext>
           </a:extLst>
         </p:spPr>
@@ -20888,7 +20888,7 @@
           </a:ln>
           <a:extLst>
             <a:ext uri="{C572A759-6A51-4108-AA02-DFA0A04FC94B}">
-              <ma14:wrappingTextBoxFlag xmlns:ma14="http://schemas.microsoft.com/office/mac/drawingml/2011/main" xmlns:a14="http://schemas.microsoft.com/office/drawing/2010/main" xmlns:m="http://schemas.openxmlformats.org/officeDocument/2006/math" xmlns="" val="1"/>
+              <ma14:wrappingTextBoxFlag xmlns="" xmlns:m="http://schemas.openxmlformats.org/officeDocument/2006/math" xmlns:a14="http://schemas.microsoft.com/office/drawing/2010/main" xmlns:ma14="http://schemas.microsoft.com/office/mac/drawingml/2011/main" val="1"/>
             </a:ext>
           </a:extLst>
         </p:spPr>
@@ -20946,7 +20946,7 @@
           </a:ln>
           <a:extLst>
             <a:ext uri="{C572A759-6A51-4108-AA02-DFA0A04FC94B}">
-              <ma14:wrappingTextBoxFlag xmlns:ma14="http://schemas.microsoft.com/office/mac/drawingml/2011/main" xmlns:a14="http://schemas.microsoft.com/office/drawing/2010/main" xmlns:m="http://schemas.openxmlformats.org/officeDocument/2006/math" xmlns="" val="1"/>
+              <ma14:wrappingTextBoxFlag xmlns="" xmlns:m="http://schemas.openxmlformats.org/officeDocument/2006/math" xmlns:a14="http://schemas.microsoft.com/office/drawing/2010/main" xmlns:ma14="http://schemas.microsoft.com/office/mac/drawingml/2011/main" val="1"/>
             </a:ext>
           </a:extLst>
         </p:spPr>
@@ -20997,7 +20997,7 @@
           </a:ln>
           <a:extLst>
             <a:ext uri="{C572A759-6A51-4108-AA02-DFA0A04FC94B}">
-              <ma14:wrappingTextBoxFlag xmlns:ma14="http://schemas.microsoft.com/office/mac/drawingml/2011/main" xmlns:a14="http://schemas.microsoft.com/office/drawing/2010/main" xmlns:m="http://schemas.openxmlformats.org/officeDocument/2006/math" xmlns="" val="1"/>
+              <ma14:wrappingTextBoxFlag xmlns="" xmlns:m="http://schemas.openxmlformats.org/officeDocument/2006/math" xmlns:a14="http://schemas.microsoft.com/office/drawing/2010/main" xmlns:ma14="http://schemas.microsoft.com/office/mac/drawingml/2011/main" val="1"/>
             </a:ext>
           </a:extLst>
         </p:spPr>
@@ -21055,7 +21055,7 @@
           </a:ln>
           <a:extLst>
             <a:ext uri="{C572A759-6A51-4108-AA02-DFA0A04FC94B}">
-              <ma14:wrappingTextBoxFlag xmlns:ma14="http://schemas.microsoft.com/office/mac/drawingml/2011/main" xmlns:a14="http://schemas.microsoft.com/office/drawing/2010/main" xmlns:m="http://schemas.openxmlformats.org/officeDocument/2006/math" xmlns="" val="1"/>
+              <ma14:wrappingTextBoxFlag xmlns="" xmlns:m="http://schemas.openxmlformats.org/officeDocument/2006/math" xmlns:a14="http://schemas.microsoft.com/office/drawing/2010/main" xmlns:ma14="http://schemas.microsoft.com/office/mac/drawingml/2011/main" val="1"/>
             </a:ext>
           </a:extLst>
         </p:spPr>
@@ -21112,7 +21112,7 @@
           </a:ln>
           <a:extLst>
             <a:ext uri="{C572A759-6A51-4108-AA02-DFA0A04FC94B}">
-              <ma14:wrappingTextBoxFlag xmlns:ma14="http://schemas.microsoft.com/office/mac/drawingml/2011/main" xmlns:a14="http://schemas.microsoft.com/office/drawing/2010/main" xmlns:m="http://schemas.openxmlformats.org/officeDocument/2006/math" xmlns="" val="1"/>
+              <ma14:wrappingTextBoxFlag xmlns="" xmlns:m="http://schemas.openxmlformats.org/officeDocument/2006/math" xmlns:a14="http://schemas.microsoft.com/office/drawing/2010/main" xmlns:ma14="http://schemas.microsoft.com/office/mac/drawingml/2011/main" val="1"/>
             </a:ext>
           </a:extLst>
         </p:spPr>
